--- a/e2e/fixtures/file-types/slides.pptx
+++ b/e2e/fixtures/file-types/slides.pptx
@@ -6,6 +6,13 @@
   </p:sldMasterIdLst>
   <p:sldIdLst>
     <p:sldId id="256" r:id="rId7"/>
+    <p:sldId id="257" r:id="rId8"/>
+    <p:sldId id="258" r:id="rId9"/>
+    <p:sldId id="259" r:id="rId10"/>
+    <p:sldId id="260" r:id="rId11"/>
+    <p:sldId id="261" r:id="rId12"/>
+    <p:sldId id="262" r:id="rId13"/>
+    <p:sldId id="263" r:id="rId14"/>
   </p:sldIdLst>
   <p:sldSz cx="9144000" cy="6858000" type="screen4x3"/>
   <p:notesSz cx="6858000" cy="9144000"/>
@@ -3104,7 +3111,7 @@
           <a:lstStyle/>
           <a:p>
             <a:r>
-              <a:t>BRF Filex Demo</a:t>
+              <a:t>BRF Filex</a:t>
             </a:r>
           </a:p>
         </p:txBody>
@@ -3125,7 +3132,600 @@
           <a:lstStyle/>
           <a:p>
             <a:r>
-              <a:t>Sample presentation to exercise OnlyOffice pptx rendering in the viewer audit.</a:t>
+              <a:t>Self-hosted file management for the brf.sh stack</a:t>
+            </a:r>
+          </a:p>
+        </p:txBody>
+      </p:sp>
+    </p:spTree>
+  </p:cSld>
+  <p:clrMapOvr>
+    <a:masterClrMapping/>
+  </p:clrMapOvr>
+</p:sld>
+</file>
+
+<file path=ppt/slides/slide2.xml><?xml version="1.0" encoding="utf-8"?>
+<p:sld xmlns:a="http://schemas.openxmlformats.org/drawingml/2006/main" xmlns:p="http://schemas.openxmlformats.org/presentationml/2006/main" xmlns:r="http://schemas.openxmlformats.org/officeDocument/2006/relationships">
+  <p:cSld>
+    <p:spTree>
+      <p:nvGrpSpPr>
+        <p:cNvPr id="1" name=""/>
+        <p:cNvGrpSpPr/>
+        <p:nvPr/>
+      </p:nvGrpSpPr>
+      <p:grpSpPr/>
+      <p:sp>
+        <p:nvSpPr>
+          <p:cNvPr id="2" name="Title 1"/>
+          <p:cNvSpPr>
+            <a:spLocks noGrp="1"/>
+          </p:cNvSpPr>
+          <p:nvPr>
+            <p:ph type="title"/>
+          </p:nvPr>
+        </p:nvSpPr>
+        <p:spPr/>
+        <p:txBody>
+          <a:bodyPr/>
+          <a:lstStyle/>
+          <a:p>
+            <a:r>
+              <a:t>Agenda</a:t>
+            </a:r>
+          </a:p>
+        </p:txBody>
+      </p:sp>
+      <p:sp>
+        <p:nvSpPr>
+          <p:cNvPr id="3" name="Content Placeholder 2"/>
+          <p:cNvSpPr>
+            <a:spLocks noGrp="1"/>
+          </p:cNvSpPr>
+          <p:nvPr>
+            <p:ph idx="1"/>
+          </p:nvPr>
+        </p:nvSpPr>
+        <p:spPr/>
+        <p:txBody>
+          <a:bodyPr/>
+          <a:lstStyle/>
+          <a:p>
+            <a:r>
+              <a:t>1. Why filex</a:t>
+            </a:r>
+          </a:p>
+          <a:p>
+            <a:r>
+              <a:t>2. Architecture</a:t>
+            </a:r>
+          </a:p>
+          <a:p>
+            <a:r>
+              <a:t>3. Storage drivers</a:t>
+            </a:r>
+          </a:p>
+          <a:p>
+            <a:r>
+              <a:t>4. Sync pipeline</a:t>
+            </a:r>
+          </a:p>
+          <a:p>
+            <a:r>
+              <a:t>5. Thumb pipeline</a:t>
+            </a:r>
+          </a:p>
+          <a:p>
+            <a:r>
+              <a:t>6. Replica &amp; reconcile</a:t>
+            </a:r>
+          </a:p>
+          <a:p>
+            <a:r>
+              <a:t>7. Deployment</a:t>
+            </a:r>
+          </a:p>
+        </p:txBody>
+      </p:sp>
+    </p:spTree>
+  </p:cSld>
+  <p:clrMapOvr>
+    <a:masterClrMapping/>
+  </p:clrMapOvr>
+</p:sld>
+</file>
+
+<file path=ppt/slides/slide3.xml><?xml version="1.0" encoding="utf-8"?>
+<p:sld xmlns:a="http://schemas.openxmlformats.org/drawingml/2006/main" xmlns:p="http://schemas.openxmlformats.org/presentationml/2006/main" xmlns:r="http://schemas.openxmlformats.org/officeDocument/2006/relationships">
+  <p:cSld>
+    <p:spTree>
+      <p:nvGrpSpPr>
+        <p:cNvPr id="1" name=""/>
+        <p:cNvGrpSpPr/>
+        <p:nvPr/>
+      </p:nvGrpSpPr>
+      <p:grpSpPr/>
+      <p:sp>
+        <p:nvSpPr>
+          <p:cNvPr id="2" name="Title 1"/>
+          <p:cNvSpPr>
+            <a:spLocks noGrp="1"/>
+          </p:cNvSpPr>
+          <p:nvPr>
+            <p:ph type="title"/>
+          </p:nvPr>
+        </p:nvSpPr>
+        <p:spPr/>
+        <p:txBody>
+          <a:bodyPr/>
+          <a:lstStyle/>
+          <a:p>
+            <a:r>
+              <a:t>Why filex?</a:t>
+            </a:r>
+          </a:p>
+        </p:txBody>
+      </p:sp>
+      <p:sp>
+        <p:nvSpPr>
+          <p:cNvPr id="3" name="Content Placeholder 2"/>
+          <p:cNvSpPr>
+            <a:spLocks noGrp="1"/>
+          </p:cNvSpPr>
+          <p:nvPr>
+            <p:ph idx="1"/>
+          </p:nvPr>
+        </p:nvSpPr>
+        <p:spPr/>
+        <p:txBody>
+          <a:bodyPr/>
+          <a:lstStyle/>
+          <a:p>
+            <a:r>
+              <a:t>Self-hosted: no SaaS lock-in</a:t>
+            </a:r>
+          </a:p>
+          <a:p>
+            <a:r>
+              <a:t>Single binary: Go, no runtime</a:t>
+            </a:r>
+          </a:p>
+          <a:p>
+            <a:r>
+              <a:t>Pluggable storage backends</a:t>
+            </a:r>
+          </a:p>
+          <a:p>
+            <a:r>
+              <a:t>Replica for DR + air-gapped mirrors</a:t>
+            </a:r>
+          </a:p>
+          <a:p>
+            <a:r>
+              <a:t>Queue-backed background work</a:t>
+            </a:r>
+          </a:p>
+          <a:p>
+            <a:r>
+              <a:t>Bring-your-own thumb pipeline</a:t>
+            </a:r>
+          </a:p>
+        </p:txBody>
+      </p:sp>
+    </p:spTree>
+  </p:cSld>
+  <p:clrMapOvr>
+    <a:masterClrMapping/>
+  </p:clrMapOvr>
+</p:sld>
+</file>
+
+<file path=ppt/slides/slide4.xml><?xml version="1.0" encoding="utf-8"?>
+<p:sld xmlns:a="http://schemas.openxmlformats.org/drawingml/2006/main" xmlns:p="http://schemas.openxmlformats.org/presentationml/2006/main" xmlns:r="http://schemas.openxmlformats.org/officeDocument/2006/relationships">
+  <p:cSld>
+    <p:spTree>
+      <p:nvGrpSpPr>
+        <p:cNvPr id="1" name=""/>
+        <p:cNvGrpSpPr/>
+        <p:nvPr/>
+      </p:nvGrpSpPr>
+      <p:grpSpPr/>
+      <p:sp>
+        <p:nvSpPr>
+          <p:cNvPr id="2" name="Title 1"/>
+          <p:cNvSpPr>
+            <a:spLocks noGrp="1"/>
+          </p:cNvSpPr>
+          <p:nvPr>
+            <p:ph type="title"/>
+          </p:nvPr>
+        </p:nvSpPr>
+        <p:spPr/>
+        <p:txBody>
+          <a:bodyPr/>
+          <a:lstStyle/>
+          <a:p>
+            <a:r>
+              <a:t>Architecture</a:t>
+            </a:r>
+          </a:p>
+        </p:txBody>
+      </p:sp>
+      <p:sp>
+        <p:nvSpPr>
+          <p:cNvPr id="3" name="TextBox 2"/>
+          <p:cNvSpPr txBox="1"/>
+          <p:nvPr/>
+        </p:nvSpPr>
+        <p:spPr>
+          <a:xfrm>
+            <a:off x="457200" y="1371600"/>
+            <a:ext cx="8229600" cy="4572000"/>
+          </a:xfrm>
+          <a:prstGeom prst="rect">
+            <a:avLst/>
+          </a:prstGeom>
+          <a:noFill/>
+        </p:spPr>
+        <p:txBody>
+          <a:bodyPr wrap="none">
+            <a:spAutoFit/>
+          </a:bodyPr>
+          <a:lstStyle/>
+          <a:p>
+            <a:r>
+              <a:t>HTTP API (chi) → handlers → services → store + storage drivers</a:t>
+            </a:r>
+          </a:p>
+          <a:p/>
+          <a:p>
+            <a:r>
+              <a:t>Storage drivers: local, s3, ftp, sftp, webdav</a:t>
+            </a:r>
+          </a:p>
+          <a:p>
+            <a:r>
+              <a:t>Queue: sqlite (default), redis, postgres</a:t>
+            </a:r>
+          </a:p>
+          <a:p>
+            <a:r>
+              <a:t>Search: bleve (embedded)</a:t>
+            </a:r>
+          </a:p>
+          <a:p>
+            <a:r>
+              <a:t>Thumbs: ffmpeg + gs + libreoffice</a:t>
+            </a:r>
+          </a:p>
+        </p:txBody>
+      </p:sp>
+    </p:spTree>
+  </p:cSld>
+  <p:clrMapOvr>
+    <a:masterClrMapping/>
+  </p:clrMapOvr>
+</p:sld>
+</file>
+
+<file path=ppt/slides/slide5.xml><?xml version="1.0" encoding="utf-8"?>
+<p:sld xmlns:a="http://schemas.openxmlformats.org/drawingml/2006/main" xmlns:p="http://schemas.openxmlformats.org/presentationml/2006/main" xmlns:r="http://schemas.openxmlformats.org/officeDocument/2006/relationships">
+  <p:cSld>
+    <p:spTree>
+      <p:nvGrpSpPr>
+        <p:cNvPr id="1" name=""/>
+        <p:cNvGrpSpPr/>
+        <p:nvPr/>
+      </p:nvGrpSpPr>
+      <p:grpSpPr/>
+      <p:sp>
+        <p:nvSpPr>
+          <p:cNvPr id="2" name="Title 1"/>
+          <p:cNvSpPr>
+            <a:spLocks noGrp="1"/>
+          </p:cNvSpPr>
+          <p:nvPr>
+            <p:ph type="title"/>
+          </p:nvPr>
+        </p:nvSpPr>
+        <p:spPr/>
+        <p:txBody>
+          <a:bodyPr/>
+          <a:lstStyle/>
+          <a:p>
+            <a:r>
+              <a:t>Storage Drivers</a:t>
+            </a:r>
+          </a:p>
+        </p:txBody>
+      </p:sp>
+      <p:sp>
+        <p:nvSpPr>
+          <p:cNvPr id="3" name="Content Placeholder 2"/>
+          <p:cNvSpPr>
+            <a:spLocks noGrp="1"/>
+          </p:cNvSpPr>
+          <p:nvPr>
+            <p:ph idx="1"/>
+          </p:nvPr>
+        </p:nvSpPr>
+        <p:spPr/>
+        <p:txBody>
+          <a:bodyPr/>
+          <a:lstStyle/>
+          <a:p>
+            <a:r>
+              <a:t>local — fsnotify Watch, fastest path</a:t>
+            </a:r>
+          </a:p>
+          <a:p>
+            <a:r>
+              <a:t>s3 — Hetzner / AWS / MinIO compatible</a:t>
+            </a:r>
+          </a:p>
+          <a:p>
+            <a:r>
+              <a:t>ftp — legacy plain-text</a:t>
+            </a:r>
+          </a:p>
+          <a:p>
+            <a:r>
+              <a:t>sftp — SSH-tunneled file transfer</a:t>
+            </a:r>
+          </a:p>
+          <a:p>
+            <a:r>
+              <a:t>webdav — Pasbolt / Nextcloud bridge</a:t>
+            </a:r>
+          </a:p>
+          <a:p>
+            <a:r>
+              <a:t>Roll your own: implement storage.Driver</a:t>
+            </a:r>
+          </a:p>
+        </p:txBody>
+      </p:sp>
+    </p:spTree>
+  </p:cSld>
+  <p:clrMapOvr>
+    <a:masterClrMapping/>
+  </p:clrMapOvr>
+</p:sld>
+</file>
+
+<file path=ppt/slides/slide6.xml><?xml version="1.0" encoding="utf-8"?>
+<p:sld xmlns:a="http://schemas.openxmlformats.org/drawingml/2006/main" xmlns:p="http://schemas.openxmlformats.org/presentationml/2006/main" xmlns:r="http://schemas.openxmlformats.org/officeDocument/2006/relationships">
+  <p:cSld>
+    <p:spTree>
+      <p:nvGrpSpPr>
+        <p:cNvPr id="1" name=""/>
+        <p:cNvGrpSpPr/>
+        <p:nvPr/>
+      </p:nvGrpSpPr>
+      <p:grpSpPr/>
+      <p:sp>
+        <p:nvSpPr>
+          <p:cNvPr id="2" name="Title 1"/>
+          <p:cNvSpPr>
+            <a:spLocks noGrp="1"/>
+          </p:cNvSpPr>
+          <p:nvPr>
+            <p:ph type="title"/>
+          </p:nvPr>
+        </p:nvSpPr>
+        <p:spPr/>
+        <p:txBody>
+          <a:bodyPr/>
+          <a:lstStyle/>
+          <a:p>
+            <a:r>
+              <a:t>Sync Pipeline</a:t>
+            </a:r>
+          </a:p>
+        </p:txBody>
+      </p:sp>
+      <p:sp>
+        <p:nvSpPr>
+          <p:cNvPr id="3" name="Content Placeholder 2"/>
+          <p:cNvSpPr>
+            <a:spLocks noGrp="1"/>
+          </p:cNvSpPr>
+          <p:nvPr>
+            <p:ph idx="1"/>
+          </p:nvPr>
+        </p:nvSpPr>
+        <p:spPr/>
+        <p:txBody>
+          <a:bodyPr/>
+          <a:lstStyle/>
+          <a:p>
+            <a:r>
+              <a:t>Worker walks backend → reconcile vs DB</a:t>
+            </a:r>
+          </a:p>
+          <a:p>
+            <a:r>
+              <a:t>Modes: poll (15min), fsnotify, ondemand</a:t>
+            </a:r>
+          </a:p>
+          <a:p>
+            <a:r>
+              <a:t>Emits side-effect jobs to queue</a:t>
+            </a:r>
+          </a:p>
+          <a:p>
+            <a:r>
+              <a:t>Thumb + index + replica fan-out</a:t>
+            </a:r>
+          </a:p>
+          <a:p>
+            <a:r>
+              <a:t>Drift report: state=ok / drifted / failed</a:t>
+            </a:r>
+          </a:p>
+        </p:txBody>
+      </p:sp>
+    </p:spTree>
+  </p:cSld>
+  <p:clrMapOvr>
+    <a:masterClrMapping/>
+  </p:clrMapOvr>
+</p:sld>
+</file>
+
+<file path=ppt/slides/slide7.xml><?xml version="1.0" encoding="utf-8"?>
+<p:sld xmlns:a="http://schemas.openxmlformats.org/drawingml/2006/main" xmlns:p="http://schemas.openxmlformats.org/presentationml/2006/main" xmlns:r="http://schemas.openxmlformats.org/officeDocument/2006/relationships">
+  <p:cSld>
+    <p:spTree>
+      <p:nvGrpSpPr>
+        <p:cNvPr id="1" name=""/>
+        <p:cNvGrpSpPr/>
+        <p:nvPr/>
+      </p:nvGrpSpPr>
+      <p:grpSpPr/>
+      <p:sp>
+        <p:nvSpPr>
+          <p:cNvPr id="2" name="Title 1"/>
+          <p:cNvSpPr>
+            <a:spLocks noGrp="1"/>
+          </p:cNvSpPr>
+          <p:nvPr>
+            <p:ph type="title"/>
+          </p:nvPr>
+        </p:nvSpPr>
+        <p:spPr/>
+        <p:txBody>
+          <a:bodyPr/>
+          <a:lstStyle/>
+          <a:p>
+            <a:r>
+              <a:t>Replica &amp; Reconcile</a:t>
+            </a:r>
+          </a:p>
+        </p:txBody>
+      </p:sp>
+      <p:sp>
+        <p:nvSpPr>
+          <p:cNvPr id="3" name="Content Placeholder 2"/>
+          <p:cNvSpPr>
+            <a:spLocks noGrp="1"/>
+          </p:cNvSpPr>
+          <p:nvPr>
+            <p:ph idx="1"/>
+          </p:nvPr>
+        </p:nvSpPr>
+        <p:spPr/>
+        <p:txBody>
+          <a:bodyPr/>
+          <a:lstStyle/>
+          <a:p>
+            <a:r>
+              <a:t>Primary → replica fan-out</a:t>
+            </a:r>
+          </a:p>
+          <a:p>
+            <a:r>
+              <a:t>Path-glob rules: mirror, append-only, skip</a:t>
+            </a:r>
+          </a:p>
+          <a:p>
+            <a:r>
+              <a:t>Cron-driven reconcile report</a:t>
+            </a:r>
+          </a:p>
+          <a:p>
+            <a:r>
+              <a:t>One-click 'Fix all' from admin UI</a:t>
+            </a:r>
+          </a:p>
+          <a:p>
+            <a:r>
+              <a:t>Used in brf.sh DR setup (Hetzner ↔ brkip)</a:t>
+            </a:r>
+          </a:p>
+        </p:txBody>
+      </p:sp>
+    </p:spTree>
+  </p:cSld>
+  <p:clrMapOvr>
+    <a:masterClrMapping/>
+  </p:clrMapOvr>
+</p:sld>
+</file>
+
+<file path=ppt/slides/slide8.xml><?xml version="1.0" encoding="utf-8"?>
+<p:sld xmlns:a="http://schemas.openxmlformats.org/drawingml/2006/main" xmlns:p="http://schemas.openxmlformats.org/presentationml/2006/main" xmlns:r="http://schemas.openxmlformats.org/officeDocument/2006/relationships">
+  <p:cSld>
+    <p:spTree>
+      <p:nvGrpSpPr>
+        <p:cNvPr id="1" name=""/>
+        <p:cNvGrpSpPr/>
+        <p:nvPr/>
+      </p:nvGrpSpPr>
+      <p:grpSpPr/>
+      <p:sp>
+        <p:nvSpPr>
+          <p:cNvPr id="2" name="Title 1"/>
+          <p:cNvSpPr>
+            <a:spLocks noGrp="1"/>
+          </p:cNvSpPr>
+          <p:nvPr>
+            <p:ph type="title"/>
+          </p:nvPr>
+        </p:nvSpPr>
+        <p:spPr/>
+        <p:txBody>
+          <a:bodyPr/>
+          <a:lstStyle/>
+          <a:p>
+            <a:r>
+              <a:t>Deployment</a:t>
+            </a:r>
+          </a:p>
+        </p:txBody>
+      </p:sp>
+      <p:sp>
+        <p:nvSpPr>
+          <p:cNvPr id="3" name="Content Placeholder 2"/>
+          <p:cNvSpPr>
+            <a:spLocks noGrp="1"/>
+          </p:cNvSpPr>
+          <p:nvPr>
+            <p:ph idx="1"/>
+          </p:nvPr>
+        </p:nvSpPr>
+        <p:spPr/>
+        <p:txBody>
+          <a:bodyPr/>
+          <a:lstStyle/>
+          <a:p>
+            <a:r>
+              <a:t>Docker image: brftech/filex</a:t>
+            </a:r>
+          </a:p>
+          <a:p>
+            <a:r>
+              <a:t>Single binary inside (Go static)</a:t>
+            </a:r>
+          </a:p>
+          <a:p>
+            <a:r>
+              <a:t>Frontend embedded at build time</a:t>
+            </a:r>
+          </a:p>
+          <a:p>
+            <a:r>
+              <a:t>ffmpeg/gs/libreoffice for full thumbs</a:t>
+            </a:r>
+          </a:p>
+          <a:p>
+            <a:r>
+              <a:t>~700 MB image, ~80 MB binary</a:t>
+            </a:r>
+          </a:p>
+          <a:p>
+            <a:r>
+              <a:t>fm.brf.sh + demo-fm.brf.sh in production</a:t>
             </a:r>
           </a:p>
         </p:txBody>
